--- a/classes/parte-1-redes-y-seguridad-de-redes/035-ids-ips-con-snort-y-suricata/clase-035-presentacion.pptx
+++ b/classes/parte-1-redes-y-seguridad-de-redes/035-ids-ips-con-snort-y-suricata/clase-035-presentacion.pptx
@@ -17,6 +17,9 @@
     <p:sldId id="265" r:id="rId16"/>
     <p:sldId id="266" r:id="rId17"/>
     <p:sldId id="267" r:id="rId18"/>
+    <p:sldId id="268" r:id="rId19"/>
+    <p:sldId id="269" r:id="rId20"/>
+    <p:sldId id="270" r:id="rId21"/>
   </p:sldIdLst>
   <p:sldSz cx="9144000" cy="6858000" type="screen4x3"/>
   <p:notesSz cx="6858000" cy="9144000"/>
@@ -3198,7 +3201,7 @@
                   <a:srgbClr val="0B3D2E"/>
                 </a:solidFill>
               </a:rPr>
-              <a:t>⚠️ Errores comunes</a:t>
+              <a:t>✍️ Ejercicios</a:t>
             </a:r>
           </a:p>
         </p:txBody>
@@ -3236,67 +3239,82 @@
                   <a:srgbClr val="22282E"/>
                 </a:solidFill>
               </a:rPr>
-              <a:t>•  "Signature has no sid" — Falta sid: en la regla; añade un SID único ≥ 1000000 para reglas locales</a:t>
-            </a:r>
-          </a:p>
-          <a:p>
-            <a:pPr>
-              <a:spcAft>
-                <a:spcPts val="600"/>
-              </a:spcAft>
-            </a:pPr>
-            <a:r>
-              <a:rPr sz="1500">
-                <a:solidFill>
-                  <a:srgbClr val="22282E"/>
-                </a:solidFill>
-              </a:rPr>
-              <a:t>•  La regla no dispara — $HOMENET mal definido o flow incorrecto; revisa variables en el YAML y la dirección</a:t>
-            </a:r>
-          </a:p>
-          <a:p>
-            <a:pPr>
-              <a:spcAft>
-                <a:spcPts val="600"/>
-              </a:spcAft>
-            </a:pPr>
-            <a:r>
-              <a:rPr sz="1500">
-                <a:solidFill>
-                  <a:srgbClr val="22282E"/>
-                </a:solidFill>
-              </a:rPr>
-              <a:t>•  Suricata no captura en vivo — Interfaz equivocada o sin permisos; verifica -i y ejecuta con privilegios</a:t>
-            </a:r>
-          </a:p>
-          <a:p>
-            <a:pPr>
-              <a:spcAft>
-                <a:spcPts val="600"/>
-              </a:spcAft>
-            </a:pPr>
-            <a:r>
-              <a:rPr sz="1500">
-                <a:solidFill>
-                  <a:srgbClr val="22282E"/>
-                </a:solidFill>
-              </a:rPr>
-              <a:t>•  Miles de alertas ruidosas — Reglas demasiado genéricas activas; afina con suricata-update y umbrales</a:t>
-            </a:r>
-          </a:p>
-          <a:p>
-            <a:pPr>
-              <a:spcAft>
-                <a:spcPts val="600"/>
-              </a:spcAft>
-            </a:pPr>
-            <a:r>
-              <a:rPr sz="1500">
-                <a:solidFill>
-                  <a:srgbClr val="22282E"/>
-                </a:solidFill>
-              </a:rPr>
-              <a:t>•  IPS corta tráfico legítimo — Firma con falso positivo en modo inline; valida siempre primero en modo IDS</a:t>
+              <a:t>•  Escribe una regla que alerte sobre intentos de conexión a un puerto de administración (p. ej. 3389).</a:t>
+            </a:r>
+          </a:p>
+          <a:p>
+            <a:pPr>
+              <a:spcAft>
+                <a:spcPts val="600"/>
+              </a:spcAft>
+            </a:pPr>
+            <a:r>
+              <a:rPr sz="1500">
+                <a:solidFill>
+                  <a:srgbClr val="22282E"/>
+                </a:solidFill>
+              </a:rPr>
+              <a:t>•  Crea una firma con pcre que detecte una cadena en URL con expresión regular.</a:t>
+            </a:r>
+          </a:p>
+          <a:p>
+            <a:pPr>
+              <a:spcAft>
+                <a:spcPts val="600"/>
+              </a:spcAft>
+            </a:pPr>
+            <a:r>
+              <a:rPr sz="1500">
+                <a:solidFill>
+                  <a:srgbClr val="22282E"/>
+                </a:solidFill>
+              </a:rPr>
+              <a:t>•  Usa flowbits para correlacionar dos eventos de una misma sesión.</a:t>
+            </a:r>
+          </a:p>
+          <a:p>
+            <a:pPr>
+              <a:spcAft>
+                <a:spcPts val="600"/>
+              </a:spcAft>
+            </a:pPr>
+            <a:r>
+              <a:rPr sz="1500">
+                <a:solidFill>
+                  <a:srgbClr val="22282E"/>
+                </a:solidFill>
+              </a:rPr>
+              <a:t>•  Procesa un pcap con tráfico DNS y extrae con jq todas las consultas registradas por Suricata.</a:t>
+            </a:r>
+          </a:p>
+          <a:p>
+            <a:pPr>
+              <a:spcAft>
+                <a:spcPts val="600"/>
+              </a:spcAft>
+            </a:pPr>
+            <a:r>
+              <a:rPr sz="1500">
+                <a:solidFill>
+                  <a:srgbClr val="22282E"/>
+                </a:solidFill>
+              </a:rPr>
+              <a:t>•  Configura un umbral (threshold) para limitar alertas repetidas de una misma firma.</a:t>
+            </a:r>
+          </a:p>
+          <a:p>
+            <a:pPr>
+              <a:spcAft>
+                <a:spcPts val="600"/>
+              </a:spcAft>
+            </a:pPr>
+            <a:r>
+              <a:rPr sz="1500">
+                <a:solidFill>
+                  <a:srgbClr val="22282E"/>
+                </a:solidFill>
+              </a:rPr>
+              <a:t>•  Compara el rendimiento (paquetes/s) de Suricata multihilo frente a Snort en el mismo pcap.</a:t>
             </a:r>
           </a:p>
         </p:txBody>
@@ -3347,7 +3365,7 @@
                   <a:srgbClr val="0B3D2E"/>
                 </a:solidFill>
               </a:rPr>
-              <a:t>❓ Preguntas frecuentes</a:t>
+              <a:t>📝 Reto verificable</a:t>
             </a:r>
           </a:p>
         </p:txBody>
@@ -3385,97 +3403,22 @@
                   <a:srgbClr val="22282E"/>
                 </a:solidFill>
               </a:rPr>
-              <a:t>•  ❓ ¿Snort o Suricata?</a:t>
-            </a:r>
-          </a:p>
-          <a:p>
-            <a:pPr>
-              <a:spcAft>
-                <a:spcPts val="600"/>
-              </a:spcAft>
-            </a:pPr>
-            <a:r>
-              <a:rPr sz="1500">
-                <a:solidFill>
-                  <a:srgbClr val="22282E"/>
-                </a:solidFill>
-              </a:rPr>
-              <a:t>•  Suricata es multihilo (mejor en redes rápidas) y trae EVE JSON nativo. Snort 3 también es moderno. Ambos comparten en gran medida el formato de reglas; aprende Suricata como base.</a:t>
-            </a:r>
-          </a:p>
-          <a:p>
-            <a:pPr>
-              <a:spcAft>
-                <a:spcPts val="600"/>
-              </a:spcAft>
-            </a:pPr>
-            <a:r>
-              <a:rPr sz="1500">
-                <a:solidFill>
-                  <a:srgbClr val="22282E"/>
-                </a:solidFill>
-              </a:rPr>
-              <a:t>•  ❓ ¿La detección por firmas detecta amenazas nuevas?</a:t>
-            </a:r>
-          </a:p>
-          <a:p>
-            <a:pPr>
-              <a:spcAft>
-                <a:spcPts val="600"/>
-              </a:spcAft>
-            </a:pPr>
-            <a:r>
-              <a:rPr sz="1500">
-                <a:solidFill>
-                  <a:srgbClr val="22282E"/>
-                </a:solidFill>
-              </a:rPr>
-              <a:t>•  No las desconocidas (zero-day) sin firma. Por eso se combina con detección por anomalías y con NSM (clases 043–045).</a:t>
-            </a:r>
-          </a:p>
-          <a:p>
-            <a:pPr>
-              <a:spcAft>
-                <a:spcPts val="600"/>
-              </a:spcAft>
-            </a:pPr>
-            <a:r>
-              <a:rPr sz="1500">
-                <a:solidFill>
-                  <a:srgbClr val="22282E"/>
-                </a:solidFill>
-              </a:rPr>
-              <a:t>•  ❓ ¿Qué es HOMENET?</a:t>
-            </a:r>
-          </a:p>
-          <a:p>
-            <a:pPr>
-              <a:spcAft>
-                <a:spcPts val="600"/>
-              </a:spcAft>
-            </a:pPr>
-            <a:r>
-              <a:rPr sz="1500">
-                <a:solidFill>
-                  <a:srgbClr val="22282E"/>
-                </a:solidFill>
-              </a:rPr>
-              <a:t>•  La variable que define tu red a proteger. Firmas y direcciones (-&gt; $HOMENET) dependen de configurarla bien en el YAML.</a:t>
-            </a:r>
-          </a:p>
-          <a:p>
-            <a:pPr>
-              <a:spcAft>
-                <a:spcPts val="600"/>
-              </a:spcAft>
-            </a:pPr>
-            <a:r>
-              <a:rPr sz="1500">
-                <a:solidFill>
-                  <a:srgbClr val="22282E"/>
-                </a:solidFill>
-              </a:rPr>
-              <a:t>•  ❓ ¿Puedo usar las mismas reglas en Snort y Suricata?</a:t>
+              <a:t>•  Despliega Suricata en modo IDS en tu laboratorio, escribe una regla propia que detecte un patrón de ataque concreto (p. ej. una petición HTTP a /admin con cierto user-agent), genera el tráfico que la…</a:t>
+            </a:r>
+          </a:p>
+          <a:p>
+            <a:pPr>
+              <a:spcAft>
+                <a:spcPts val="600"/>
+              </a:spcAft>
+            </a:pPr>
+            <a:r>
+              <a:rPr sz="1500">
+                <a:solidFill>
+                  <a:srgbClr val="22282E"/>
+                </a:solidFill>
+              </a:rPr>
+              <a:t>•  Criterio de aceptación: la regla tiene sid propio válido, la alerta aparece con el msg exacto al generar el tráfico, y no se dispara con tráfico legítimo similar (bajo falso positivo).</a:t>
             </a:r>
           </a:p>
         </p:txBody>
@@ -3526,7 +3469,7 @@
                   <a:srgbClr val="0B3D2E"/>
                 </a:solidFill>
               </a:rPr>
-              <a:t>🔗 Referencias</a:t>
+              <a:t>⚠️ Errores comunes</a:t>
             </a:r>
           </a:p>
         </p:txBody>
@@ -3564,6 +3507,334 @@
                   <a:srgbClr val="22282E"/>
                 </a:solidFill>
               </a:rPr>
+              <a:t>•  "Signature has no sid" — Falta sid: en la regla; añade un SID único ≥ 1000000 para reglas locales</a:t>
+            </a:r>
+          </a:p>
+          <a:p>
+            <a:pPr>
+              <a:spcAft>
+                <a:spcPts val="600"/>
+              </a:spcAft>
+            </a:pPr>
+            <a:r>
+              <a:rPr sz="1500">
+                <a:solidFill>
+                  <a:srgbClr val="22282E"/>
+                </a:solidFill>
+              </a:rPr>
+              <a:t>•  La regla no dispara — $HOMENET mal definido o flow incorrecto; revisa variables en el YAML y la dirección</a:t>
+            </a:r>
+          </a:p>
+          <a:p>
+            <a:pPr>
+              <a:spcAft>
+                <a:spcPts val="600"/>
+              </a:spcAft>
+            </a:pPr>
+            <a:r>
+              <a:rPr sz="1500">
+                <a:solidFill>
+                  <a:srgbClr val="22282E"/>
+                </a:solidFill>
+              </a:rPr>
+              <a:t>•  Suricata no captura en vivo — Interfaz equivocada o sin permisos; verifica -i y ejecuta con privilegios</a:t>
+            </a:r>
+          </a:p>
+          <a:p>
+            <a:pPr>
+              <a:spcAft>
+                <a:spcPts val="600"/>
+              </a:spcAft>
+            </a:pPr>
+            <a:r>
+              <a:rPr sz="1500">
+                <a:solidFill>
+                  <a:srgbClr val="22282E"/>
+                </a:solidFill>
+              </a:rPr>
+              <a:t>•  Miles de alertas ruidosas — Reglas demasiado genéricas activas; afina con suricata-update y umbrales</a:t>
+            </a:r>
+          </a:p>
+          <a:p>
+            <a:pPr>
+              <a:spcAft>
+                <a:spcPts val="600"/>
+              </a:spcAft>
+            </a:pPr>
+            <a:r>
+              <a:rPr sz="1500">
+                <a:solidFill>
+                  <a:srgbClr val="22282E"/>
+                </a:solidFill>
+              </a:rPr>
+              <a:t>•  IPS corta tráfico legítimo — Firma con falso positivo en modo inline; valida siempre primero en modo IDS</a:t>
+            </a:r>
+          </a:p>
+        </p:txBody>
+      </p:sp>
+    </p:spTree>
+  </p:cSld>
+  <p:clrMapOvr>
+    <a:masterClrMapping/>
+  </p:clrMapOvr>
+</p:sld>
+</file>
+
+<file path=ppt/slides/slide13.xml><?xml version="1.0" encoding="utf-8"?>
+<p:sld xmlns:a="http://schemas.openxmlformats.org/drawingml/2006/main" xmlns:p="http://schemas.openxmlformats.org/presentationml/2006/main" xmlns:r="http://schemas.openxmlformats.org/officeDocument/2006/relationships">
+  <p:cSld>
+    <p:spTree>
+      <p:nvGrpSpPr>
+        <p:cNvPr id="1" name=""/>
+        <p:cNvGrpSpPr/>
+        <p:nvPr/>
+      </p:nvGrpSpPr>
+      <p:grpSpPr/>
+      <p:sp>
+        <p:nvSpPr>
+          <p:cNvPr id="2" name="TextBox 1"/>
+          <p:cNvSpPr txBox="1"/>
+          <p:nvPr/>
+        </p:nvSpPr>
+        <p:spPr>
+          <a:xfrm>
+            <a:off x="457200" y="320040"/>
+            <a:ext cx="8229600" cy="822960"/>
+          </a:xfrm>
+          <a:prstGeom prst="rect">
+            <a:avLst/>
+          </a:prstGeom>
+          <a:noFill/>
+        </p:spPr>
+        <p:txBody>
+          <a:bodyPr wrap="square">
+            <a:spAutoFit/>
+          </a:bodyPr>
+          <a:lstStyle/>
+          <a:p>
+            <a:r>
+              <a:rPr sz="2600" b="1">
+                <a:solidFill>
+                  <a:srgbClr val="0B3D2E"/>
+                </a:solidFill>
+              </a:rPr>
+              <a:t>❓ Preguntas frecuentes</a:t>
+            </a:r>
+          </a:p>
+        </p:txBody>
+      </p:sp>
+      <p:sp>
+        <p:nvSpPr>
+          <p:cNvPr id="3" name="TextBox 2"/>
+          <p:cNvSpPr txBox="1"/>
+          <p:nvPr/>
+        </p:nvSpPr>
+        <p:spPr>
+          <a:xfrm>
+            <a:off x="457200" y="1280160"/>
+            <a:ext cx="8229600" cy="4937760"/>
+          </a:xfrm>
+          <a:prstGeom prst="rect">
+            <a:avLst/>
+          </a:prstGeom>
+          <a:noFill/>
+        </p:spPr>
+        <p:txBody>
+          <a:bodyPr wrap="square">
+            <a:spAutoFit/>
+          </a:bodyPr>
+          <a:lstStyle/>
+          <a:p>
+            <a:pPr>
+              <a:spcAft>
+                <a:spcPts val="600"/>
+              </a:spcAft>
+            </a:pPr>
+            <a:r>
+              <a:rPr sz="1500">
+                <a:solidFill>
+                  <a:srgbClr val="22282E"/>
+                </a:solidFill>
+              </a:rPr>
+              <a:t>•  ❓ ¿Snort o Suricata?</a:t>
+            </a:r>
+          </a:p>
+          <a:p>
+            <a:pPr>
+              <a:spcAft>
+                <a:spcPts val="600"/>
+              </a:spcAft>
+            </a:pPr>
+            <a:r>
+              <a:rPr sz="1500">
+                <a:solidFill>
+                  <a:srgbClr val="22282E"/>
+                </a:solidFill>
+              </a:rPr>
+              <a:t>•  Suricata es multihilo (mejor en redes rápidas) y trae EVE JSON nativo. Snort 3 también es moderno. Ambos comparten en gran medida el formato de reglas; aprende Suricata como base.</a:t>
+            </a:r>
+          </a:p>
+          <a:p>
+            <a:pPr>
+              <a:spcAft>
+                <a:spcPts val="600"/>
+              </a:spcAft>
+            </a:pPr>
+            <a:r>
+              <a:rPr sz="1500">
+                <a:solidFill>
+                  <a:srgbClr val="22282E"/>
+                </a:solidFill>
+              </a:rPr>
+              <a:t>•  ❓ ¿La detección por firmas detecta amenazas nuevas?</a:t>
+            </a:r>
+          </a:p>
+          <a:p>
+            <a:pPr>
+              <a:spcAft>
+                <a:spcPts val="600"/>
+              </a:spcAft>
+            </a:pPr>
+            <a:r>
+              <a:rPr sz="1500">
+                <a:solidFill>
+                  <a:srgbClr val="22282E"/>
+                </a:solidFill>
+              </a:rPr>
+              <a:t>•  No las desconocidas (zero-day) sin firma. Por eso se combina con detección por anomalías y con NSM (clases 043–045).</a:t>
+            </a:r>
+          </a:p>
+          <a:p>
+            <a:pPr>
+              <a:spcAft>
+                <a:spcPts val="600"/>
+              </a:spcAft>
+            </a:pPr>
+            <a:r>
+              <a:rPr sz="1500">
+                <a:solidFill>
+                  <a:srgbClr val="22282E"/>
+                </a:solidFill>
+              </a:rPr>
+              <a:t>•  ❓ ¿Qué es HOMENET?</a:t>
+            </a:r>
+          </a:p>
+          <a:p>
+            <a:pPr>
+              <a:spcAft>
+                <a:spcPts val="600"/>
+              </a:spcAft>
+            </a:pPr>
+            <a:r>
+              <a:rPr sz="1500">
+                <a:solidFill>
+                  <a:srgbClr val="22282E"/>
+                </a:solidFill>
+              </a:rPr>
+              <a:t>•  La variable que define tu red a proteger. Firmas y direcciones (-&gt; $HOMENET) dependen de configurarla bien en el YAML.</a:t>
+            </a:r>
+          </a:p>
+          <a:p>
+            <a:pPr>
+              <a:spcAft>
+                <a:spcPts val="600"/>
+              </a:spcAft>
+            </a:pPr>
+            <a:r>
+              <a:rPr sz="1500">
+                <a:solidFill>
+                  <a:srgbClr val="22282E"/>
+                </a:solidFill>
+              </a:rPr>
+              <a:t>•  ❓ ¿Puedo usar las mismas reglas en Snort y Suricata?</a:t>
+            </a:r>
+          </a:p>
+        </p:txBody>
+      </p:sp>
+    </p:spTree>
+  </p:cSld>
+  <p:clrMapOvr>
+    <a:masterClrMapping/>
+  </p:clrMapOvr>
+</p:sld>
+</file>
+
+<file path=ppt/slides/slide14.xml><?xml version="1.0" encoding="utf-8"?>
+<p:sld xmlns:a="http://schemas.openxmlformats.org/drawingml/2006/main" xmlns:p="http://schemas.openxmlformats.org/presentationml/2006/main" xmlns:r="http://schemas.openxmlformats.org/officeDocument/2006/relationships">
+  <p:cSld>
+    <p:spTree>
+      <p:nvGrpSpPr>
+        <p:cNvPr id="1" name=""/>
+        <p:cNvGrpSpPr/>
+        <p:nvPr/>
+      </p:nvGrpSpPr>
+      <p:grpSpPr/>
+      <p:sp>
+        <p:nvSpPr>
+          <p:cNvPr id="2" name="TextBox 1"/>
+          <p:cNvSpPr txBox="1"/>
+          <p:nvPr/>
+        </p:nvSpPr>
+        <p:spPr>
+          <a:xfrm>
+            <a:off x="457200" y="320040"/>
+            <a:ext cx="8229600" cy="822960"/>
+          </a:xfrm>
+          <a:prstGeom prst="rect">
+            <a:avLst/>
+          </a:prstGeom>
+          <a:noFill/>
+        </p:spPr>
+        <p:txBody>
+          <a:bodyPr wrap="square">
+            <a:spAutoFit/>
+          </a:bodyPr>
+          <a:lstStyle/>
+          <a:p>
+            <a:r>
+              <a:rPr sz="2600" b="1">
+                <a:solidFill>
+                  <a:srgbClr val="0B3D2E"/>
+                </a:solidFill>
+              </a:rPr>
+              <a:t>🔗 Referencias</a:t>
+            </a:r>
+          </a:p>
+        </p:txBody>
+      </p:sp>
+      <p:sp>
+        <p:nvSpPr>
+          <p:cNvPr id="3" name="TextBox 2"/>
+          <p:cNvSpPr txBox="1"/>
+          <p:nvPr/>
+        </p:nvSpPr>
+        <p:spPr>
+          <a:xfrm>
+            <a:off x="457200" y="1280160"/>
+            <a:ext cx="8229600" cy="4937760"/>
+          </a:xfrm>
+          <a:prstGeom prst="rect">
+            <a:avLst/>
+          </a:prstGeom>
+          <a:noFill/>
+        </p:spPr>
+        <p:txBody>
+          <a:bodyPr wrap="square">
+            <a:spAutoFit/>
+          </a:bodyPr>
+          <a:lstStyle/>
+          <a:p>
+            <a:pPr>
+              <a:spcAft>
+                <a:spcPts val="600"/>
+              </a:spcAft>
+            </a:pPr>
+            <a:r>
+              <a:rPr sz="1500">
+                <a:solidFill>
+                  <a:srgbClr val="22282E"/>
+                </a:solidFill>
+              </a:rPr>
               <a:t>•  Suricata Documentation. &lt;https://docs.suricata.io/&gt;</a:t>
             </a:r>
           </a:p>
@@ -3614,6 +3885,81 @@
           </a:p>
         </p:txBody>
       </p:sp>
+    </p:spTree>
+  </p:cSld>
+  <p:clrMapOvr>
+    <a:masterClrMapping/>
+  </p:clrMapOvr>
+</p:sld>
+</file>
+
+<file path=ppt/slides/slide15.xml><?xml version="1.0" encoding="utf-8"?>
+<p:sld xmlns:a="http://schemas.openxmlformats.org/drawingml/2006/main" xmlns:p="http://schemas.openxmlformats.org/presentationml/2006/main" xmlns:r="http://schemas.openxmlformats.org/officeDocument/2006/relationships">
+  <p:cSld>
+    <p:spTree>
+      <p:nvGrpSpPr>
+        <p:cNvPr id="1" name=""/>
+        <p:cNvGrpSpPr/>
+        <p:nvPr/>
+      </p:nvGrpSpPr>
+      <p:grpSpPr/>
+      <p:sp>
+        <p:nvSpPr>
+          <p:cNvPr id="2" name="TextBox 1"/>
+          <p:cNvSpPr txBox="1"/>
+          <p:nvPr/>
+        </p:nvSpPr>
+        <p:spPr>
+          <a:xfrm>
+            <a:off x="457200" y="274320"/>
+            <a:ext cx="8229600" cy="640080"/>
+          </a:xfrm>
+          <a:prstGeom prst="rect">
+            <a:avLst/>
+          </a:prstGeom>
+          <a:noFill/>
+        </p:spPr>
+        <p:txBody>
+          <a:bodyPr wrap="square">
+            <a:spAutoFit/>
+          </a:bodyPr>
+          <a:lstStyle/>
+          <a:p>
+            <a:r>
+              <a:rPr sz="2200" b="1">
+                <a:solidFill>
+                  <a:srgbClr val="0B3D2E"/>
+                </a:solidFill>
+              </a:rPr>
+              <a:t>Diagrama de la clase</a:t>
+            </a:r>
+          </a:p>
+        </p:txBody>
+      </p:sp>
+      <p:pic>
+        <p:nvPicPr>
+          <p:cNvPr id="3" name="Picture 2" descr="893437945393811b.png"/>
+          <p:cNvPicPr>
+            <a:picLocks noChangeAspect="1"/>
+          </p:cNvPicPr>
+          <p:nvPr/>
+        </p:nvPicPr>
+        <p:blipFill>
+          <a:blip r:embed="rId2"/>
+          <a:stretch>
+            <a:fillRect/>
+          </a:stretch>
+        </p:blipFill>
+        <p:spPr>
+          <a:xfrm>
+            <a:off x="457200" y="3140964"/>
+            <a:ext cx="8229600" cy="1216152"/>
+          </a:xfrm>
+          <a:prstGeom prst="rect">
+            <a:avLst/>
+          </a:prstGeom>
+        </p:spPr>
+      </p:pic>
     </p:spTree>
   </p:cSld>
   <p:clrMapOvr>
@@ -3698,7 +4044,7 @@
                   <a:srgbClr val="22282E"/>
                 </a:solidFill>
               </a:rPr>
-              <a:t>•  Desplegar y operar sistemas de detección/prevención de intrusiones basados en firmas con Snort y Suricata: entender la diferencia entre IDS e IPS, escribir y afinar reglas, procesar tráfico en vivo y desde pcap, e interpretar las alertas resultantes. Es el pilar de la detección basada en firmas dentro de un SOC.</a:t>
+              <a:t>•  Desplegar y operar sistemas de detección/prevención de intrusiones basados en firmas con Snort y Suricata: entender la diferencia entre IDS e IPS, escribir y afinar reglas, procesar tráfico en vivo y…</a:t>
             </a:r>
           </a:p>
         </p:txBody>
@@ -4107,7 +4453,7 @@
                   <a:srgbClr val="0B3D2E"/>
                 </a:solidFill>
               </a:rPr>
-              <a:t>📖 Definiciones y características</a:t>
+              <a:t>🧠 Explicación en profundidad</a:t>
             </a:r>
           </a:p>
         </p:txBody>
@@ -4145,82 +4491,97 @@
                   <a:srgbClr val="22282E"/>
                 </a:solidFill>
               </a:rPr>
-              <a:t>•  IDS: detecta y alerta sobre tráfico sospechoso pero no lo bloquea; se despliega fuera de línea (tap/span).</a:t>
-            </a:r>
-          </a:p>
-          <a:p>
-            <a:pPr>
-              <a:spcAft>
-                <a:spcPts val="600"/>
-              </a:spcAft>
-            </a:pPr>
-            <a:r>
-              <a:rPr sz="1500">
-                <a:solidFill>
-                  <a:srgbClr val="22282E"/>
-                </a:solidFill>
-              </a:rPr>
-              <a:t>•  IPS: se coloca en línea (inline) y puede descartar el tráfico que coincide con una firma; requiere alta fiabilidad para no cortar tráfico legítimo.</a:t>
-            </a:r>
-          </a:p>
-          <a:p>
-            <a:pPr>
-              <a:spcAft>
-                <a:spcPts val="600"/>
-              </a:spcAft>
-            </a:pPr>
-            <a:r>
-              <a:rPr sz="1500">
-                <a:solidFill>
-                  <a:srgbClr val="22282E"/>
-                </a:solidFill>
-              </a:rPr>
-              <a:t>•  Regla/firma: patrón que describe tráfico malicioso: una cabecera (acción, protocolo, IP/puertos, dirección) y opciones (qué buscar y cómo alertar).</a:t>
-            </a:r>
-          </a:p>
-          <a:p>
-            <a:pPr>
-              <a:spcAft>
-                <a:spcPts val="600"/>
-              </a:spcAft>
-            </a:pPr>
-            <a:r>
-              <a:rPr sz="1500">
-                <a:solidFill>
-                  <a:srgbClr val="22282E"/>
-                </a:solidFill>
-              </a:rPr>
-              <a:t>•  content: cadena o bytes a buscar en el payload; núcleo de la mayoría de firmas.</a:t>
-            </a:r>
-          </a:p>
-          <a:p>
-            <a:pPr>
-              <a:spcAft>
-                <a:spcPts val="600"/>
-              </a:spcAft>
-            </a:pPr>
-            <a:r>
-              <a:rPr sz="1500">
-                <a:solidFill>
-                  <a:srgbClr val="22282E"/>
-                </a:solidFill>
-              </a:rPr>
-              <a:t>•  flow: restringe la regla a una dirección/estado de la conexión (toserver,established).</a:t>
-            </a:r>
-          </a:p>
-          <a:p>
-            <a:pPr>
-              <a:spcAft>
-                <a:spcPts val="600"/>
-              </a:spcAft>
-            </a:pPr>
-            <a:r>
-              <a:rPr sz="1500">
-                <a:solidFill>
-                  <a:srgbClr val="22282E"/>
-                </a:solidFill>
-              </a:rPr>
-              <a:t>•  EVE JSON: formato de salida estructurado de Suricata que registra alertas, flujos, DNS, TLS, HTTP, etc.</a:t>
+              <a:t>•  Un IDS observa una copia del tráfico y avisa; un IPS se sitúa en el camino del</a:t>
+            </a:r>
+          </a:p>
+          <a:p>
+            <a:pPr>
+              <a:spcAft>
+                <a:spcPts val="600"/>
+              </a:spcAft>
+            </a:pPr>
+            <a:r>
+              <a:rPr sz="1500">
+                <a:solidFill>
+                  <a:srgbClr val="22282E"/>
+                </a:solidFill>
+              </a:rPr>
+              <a:t>•  tráfico y puede descartarlo. La misma herramienta —Suricata lo es— hace las dos cosas</a:t>
+            </a:r>
+          </a:p>
+          <a:p>
+            <a:pPr>
+              <a:spcAft>
+                <a:spcPts val="600"/>
+              </a:spcAft>
+            </a:pPr>
+            <a:r>
+              <a:rPr sz="1500">
+                <a:solidFill>
+                  <a:srgbClr val="22282E"/>
+                </a:solidFill>
+              </a:rPr>
+              <a:t>•  según cómo se despliegue, y la elección tiene consecuencias que van mucho más allá de lo</a:t>
+            </a:r>
+          </a:p>
+          <a:p>
+            <a:pPr>
+              <a:spcAft>
+                <a:spcPts val="600"/>
+              </a:spcAft>
+            </a:pPr>
+            <a:r>
+              <a:rPr sz="1500">
+                <a:solidFill>
+                  <a:srgbClr val="22282E"/>
+                </a:solidFill>
+              </a:rPr>
+              <a:t>•  técnico. En modo IDS, sobre un SPAN o un TAP, un falso positivo genera una alerta</a:t>
+            </a:r>
+          </a:p>
+          <a:p>
+            <a:pPr>
+              <a:spcAft>
+                <a:spcPts val="600"/>
+              </a:spcAft>
+            </a:pPr>
+            <a:r>
+              <a:rPr sz="1500">
+                <a:solidFill>
+                  <a:srgbClr val="22282E"/>
+                </a:solidFill>
+              </a:rPr>
+              <a:t>•  molesta; en modo IPS, en línea, un falso positivo corta tráfico legítimo y produce</a:t>
+            </a:r>
+          </a:p>
+          <a:p>
+            <a:pPr>
+              <a:spcAft>
+                <a:spcPts val="600"/>
+              </a:spcAft>
+            </a:pPr>
+            <a:r>
+              <a:rPr sz="1500">
+                <a:solidFill>
+                  <a:srgbClr val="22282E"/>
+                </a:solidFill>
+              </a:rPr>
+              <a:t>•  una incidencia de negocio. Y como el IPS está en el camino, si se cae o se satura se</a:t>
+            </a:r>
+          </a:p>
+          <a:p>
+            <a:pPr>
+              <a:spcAft>
+                <a:spcPts val="600"/>
+              </a:spcAft>
+            </a:pPr>
+            <a:r>
+              <a:rPr sz="1500">
+                <a:solidFill>
+                  <a:srgbClr val="22282E"/>
+                </a:solidFill>
+              </a:rPr>
+              <a:t>•  convierte en un punto único de fallo para toda la red que protege.</a:t>
             </a:r>
           </a:p>
         </p:txBody>
@@ -4271,7 +4632,7 @@
                   <a:srgbClr val="0B3D2E"/>
                 </a:solidFill>
               </a:rPr>
-              <a:t>🧰 Herramientas y preparación</a:t>
+              <a:t>📖 Definiciones y características</a:t>
             </a:r>
           </a:p>
         </p:txBody>
@@ -4309,52 +4670,82 @@
                   <a:srgbClr val="22282E"/>
                 </a:solidFill>
               </a:rPr>
-              <a:t>•  Suricata 7.x: sudo apt install suricata. Actualiza reglas con suricata-update.</a:t>
-            </a:r>
-          </a:p>
-          <a:p>
-            <a:pPr>
-              <a:spcAft>
-                <a:spcPts val="600"/>
-              </a:spcAft>
-            </a:pPr>
-            <a:r>
-              <a:rPr sz="1500">
-                <a:solidFill>
-                  <a:srgbClr val="22282E"/>
-                </a:solidFill>
-              </a:rPr>
-              <a:t>•  Snort 3.x (opcional para comparar): sudo apt install snort o compilación oficial.</a:t>
-            </a:r>
-          </a:p>
-          <a:p>
-            <a:pPr>
-              <a:spcAft>
-                <a:spcPts val="600"/>
-              </a:spcAft>
-            </a:pPr>
-            <a:r>
-              <a:rPr sz="1500">
-                <a:solidFill>
-                  <a:srgbClr val="22282E"/>
-                </a:solidFill>
-              </a:rPr>
-              <a:t>•  Reglas comunitarias: Emerging Threats Open (suricata-update las trae).</a:t>
-            </a:r>
-          </a:p>
-          <a:p>
-            <a:pPr>
-              <a:spcAft>
-                <a:spcPts val="600"/>
-              </a:spcAft>
-            </a:pPr>
-            <a:r>
-              <a:rPr sz="1500">
-                <a:solidFill>
-                  <a:srgbClr val="22282E"/>
-                </a:solidFill>
-              </a:rPr>
-              <a:t>•  Herramientas de lectura: jq para el EVE JSON, tail, un pcap de prueba.</a:t>
+              <a:t>•  IDS: detecta y alerta sobre tráfico sospechoso pero no lo bloquea; se despliega fuera de línea (tap/span).</a:t>
+            </a:r>
+          </a:p>
+          <a:p>
+            <a:pPr>
+              <a:spcAft>
+                <a:spcPts val="600"/>
+              </a:spcAft>
+            </a:pPr>
+            <a:r>
+              <a:rPr sz="1500">
+                <a:solidFill>
+                  <a:srgbClr val="22282E"/>
+                </a:solidFill>
+              </a:rPr>
+              <a:t>•  IPS: se coloca en línea (inline) y puede descartar el tráfico que coincide con una firma; requiere alta fiabilidad para no cortar tráfico legítimo.</a:t>
+            </a:r>
+          </a:p>
+          <a:p>
+            <a:pPr>
+              <a:spcAft>
+                <a:spcPts val="600"/>
+              </a:spcAft>
+            </a:pPr>
+            <a:r>
+              <a:rPr sz="1500">
+                <a:solidFill>
+                  <a:srgbClr val="22282E"/>
+                </a:solidFill>
+              </a:rPr>
+              <a:t>•  Regla/firma: patrón que describe tráfico malicioso: una cabecera (acción, protocolo, IP/puertos, dirección) y opciones (qué buscar y cómo alertar).</a:t>
+            </a:r>
+          </a:p>
+          <a:p>
+            <a:pPr>
+              <a:spcAft>
+                <a:spcPts val="600"/>
+              </a:spcAft>
+            </a:pPr>
+            <a:r>
+              <a:rPr sz="1500">
+                <a:solidFill>
+                  <a:srgbClr val="22282E"/>
+                </a:solidFill>
+              </a:rPr>
+              <a:t>•  content: cadena o bytes a buscar en el payload; núcleo de la mayoría de firmas.</a:t>
+            </a:r>
+          </a:p>
+          <a:p>
+            <a:pPr>
+              <a:spcAft>
+                <a:spcPts val="600"/>
+              </a:spcAft>
+            </a:pPr>
+            <a:r>
+              <a:rPr sz="1500">
+                <a:solidFill>
+                  <a:srgbClr val="22282E"/>
+                </a:solidFill>
+              </a:rPr>
+              <a:t>•  flow: restringe la regla a una dirección/estado de la conexión (toserver,established).</a:t>
+            </a:r>
+          </a:p>
+          <a:p>
+            <a:pPr>
+              <a:spcAft>
+                <a:spcPts val="600"/>
+              </a:spcAft>
+            </a:pPr>
+            <a:r>
+              <a:rPr sz="1500">
+                <a:solidFill>
+                  <a:srgbClr val="22282E"/>
+                </a:solidFill>
+              </a:rPr>
+              <a:t>•  EVE JSON: formato de salida estructurado de Suricata que registra alertas, flujos, DNS, TLS, HTTP, etc.</a:t>
             </a:r>
           </a:p>
         </p:txBody>
@@ -4405,7 +4796,7 @@
                   <a:srgbClr val="0B3D2E"/>
                 </a:solidFill>
               </a:rPr>
-              <a:t>🧪 Laboratorio guiado</a:t>
+              <a:t>📔 Glosario</a:t>
             </a:r>
           </a:p>
         </p:txBody>
@@ -4443,97 +4834,97 @@
                   <a:srgbClr val="22282E"/>
                 </a:solidFill>
               </a:rPr>
-              <a:t>•  Descarga reglas y verifica configuración:</a:t>
-            </a:r>
-          </a:p>
-          <a:p>
-            <a:pPr>
-              <a:spcAft>
-                <a:spcPts val="600"/>
-              </a:spcAft>
-            </a:pPr>
-            <a:r>
-              <a:rPr sz="1500">
-                <a:solidFill>
-                  <a:srgbClr val="22282E"/>
-                </a:solidFill>
-              </a:rPr>
-              <a:t>•  sudo suricata-update</a:t>
-            </a:r>
-          </a:p>
-          <a:p>
-            <a:pPr>
-              <a:spcAft>
-                <a:spcPts val="600"/>
-              </a:spcAft>
-            </a:pPr>
-            <a:r>
-              <a:rPr sz="1500">
-                <a:solidFill>
-                  <a:srgbClr val="22282E"/>
-                </a:solidFill>
-              </a:rPr>
-              <a:t>•  sudo suricata -T -c /etc/suricata/suricata.yaml   # test de config</a:t>
-            </a:r>
-          </a:p>
-          <a:p>
-            <a:pPr>
-              <a:spcAft>
-                <a:spcPts val="600"/>
-              </a:spcAft>
-            </a:pPr>
-            <a:r>
-              <a:rPr sz="1500">
-                <a:solidFill>
-                  <a:srgbClr val="22282E"/>
-                </a:solidFill>
-              </a:rPr>
-              <a:t>•  Analiza un pcap con Suricata:</a:t>
-            </a:r>
-          </a:p>
-          <a:p>
-            <a:pPr>
-              <a:spcAft>
-                <a:spcPts val="600"/>
-              </a:spcAft>
-            </a:pPr>
-            <a:r>
-              <a:rPr sz="1500">
-                <a:solidFill>
-                  <a:srgbClr val="22282E"/>
-                </a:solidFill>
-              </a:rPr>
-              <a:t>•  sudo suricata -r /tmp/lab027.pcapng -l ./salida/</a:t>
-            </a:r>
-          </a:p>
-          <a:p>
-            <a:pPr>
-              <a:spcAft>
-                <a:spcPts val="600"/>
-              </a:spcAft>
-            </a:pPr>
-            <a:r>
-              <a:rPr sz="1500">
-                <a:solidFill>
-                  <a:srgbClr val="22282E"/>
-                </a:solidFill>
-              </a:rPr>
-              <a:t>•  jq 'select(.eventtype=="alert") | .alert.signature' ./salida/eve.json</a:t>
-            </a:r>
-          </a:p>
-          <a:p>
-            <a:pPr>
-              <a:spcAft>
-                <a:spcPts val="600"/>
-              </a:spcAft>
-            </a:pPr>
-            <a:r>
-              <a:rPr sz="1500">
-                <a:solidFill>
-                  <a:srgbClr val="22282E"/>
-                </a:solidFill>
-              </a:rPr>
-              <a:t>•  Modo IDS en vivo sobre una interfaz:</a:t>
+              <a:t>•  Término — Definición concisa</a:t>
+            </a:r>
+          </a:p>
+          <a:p>
+            <a:pPr>
+              <a:spcAft>
+                <a:spcPts val="600"/>
+              </a:spcAft>
+            </a:pPr>
+            <a:r>
+              <a:rPr sz="1500">
+                <a:solidFill>
+                  <a:srgbClr val="22282E"/>
+                </a:solidFill>
+              </a:rPr>
+              <a:t>•  IDS — Detecta y alerta observando una copia del tráfico</a:t>
+            </a:r>
+          </a:p>
+          <a:p>
+            <a:pPr>
+              <a:spcAft>
+                <a:spcPts val="600"/>
+              </a:spcAft>
+            </a:pPr>
+            <a:r>
+              <a:rPr sz="1500">
+                <a:solidFill>
+                  <a:srgbClr val="22282E"/>
+                </a:solidFill>
+              </a:rPr>
+              <a:t>•  IPS — Se sitúa en línea y puede descartar el tráfico</a:t>
+            </a:r>
+          </a:p>
+          <a:p>
+            <a:pPr>
+              <a:spcAft>
+                <a:spcPts val="600"/>
+              </a:spcAft>
+            </a:pPr>
+            <a:r>
+              <a:rPr sz="1500">
+                <a:solidFill>
+                  <a:srgbClr val="22282E"/>
+                </a:solidFill>
+              </a:rPr>
+              <a:t>•  Modo en línea — Despliegue en el camino del tráfico; un fallo corta el servicio</a:t>
+            </a:r>
+          </a:p>
+          <a:p>
+            <a:pPr>
+              <a:spcAft>
+                <a:spcPts val="600"/>
+              </a:spcAft>
+            </a:pPr>
+            <a:r>
+              <a:rPr sz="1500">
+                <a:solidFill>
+                  <a:srgbClr val="22282E"/>
+                </a:solidFill>
+              </a:rPr>
+              <a:t>•  Firma / regla — Descripción de un patrón de tráfico considerado malicioso</a:t>
+            </a:r>
+          </a:p>
+          <a:p>
+            <a:pPr>
+              <a:spcAft>
+                <a:spcPts val="600"/>
+              </a:spcAft>
+            </a:pPr>
+            <a:r>
+              <a:rPr sz="1500">
+                <a:solidFill>
+                  <a:srgbClr val="22282E"/>
+                </a:solidFill>
+              </a:rPr>
+              <a:t>•  Cabecera de regla — Acción, protocolo, origen, dirección y destino</a:t>
+            </a:r>
+          </a:p>
+          <a:p>
+            <a:pPr>
+              <a:spcAft>
+                <a:spcPts val="600"/>
+              </a:spcAft>
+            </a:pPr>
+            <a:r>
+              <a:rPr sz="1500">
+                <a:solidFill>
+                  <a:srgbClr val="22282E"/>
+                </a:solidFill>
+              </a:rPr>
+              <a:t>•  flow — Acota dirección y estado de la conexión en la que aplica la regla</a:t>
             </a:r>
           </a:p>
         </p:txBody>
@@ -4584,7 +4975,7 @@
                   <a:srgbClr val="0B3D2E"/>
                 </a:solidFill>
               </a:rPr>
-              <a:t>✍️ Ejercicios</a:t>
+              <a:t>🧰 Herramientas y preparación</a:t>
             </a:r>
           </a:p>
         </p:txBody>
@@ -4622,82 +5013,52 @@
                   <a:srgbClr val="22282E"/>
                 </a:solidFill>
               </a:rPr>
-              <a:t>•  Escribe una regla que alerte sobre intentos de conexión a un puerto de administración (p. ej. 3389).</a:t>
-            </a:r>
-          </a:p>
-          <a:p>
-            <a:pPr>
-              <a:spcAft>
-                <a:spcPts val="600"/>
-              </a:spcAft>
-            </a:pPr>
-            <a:r>
-              <a:rPr sz="1500">
-                <a:solidFill>
-                  <a:srgbClr val="22282E"/>
-                </a:solidFill>
-              </a:rPr>
-              <a:t>•  Crea una firma con pcre que detecte una cadena en URL con expresión regular.</a:t>
-            </a:r>
-          </a:p>
-          <a:p>
-            <a:pPr>
-              <a:spcAft>
-                <a:spcPts val="600"/>
-              </a:spcAft>
-            </a:pPr>
-            <a:r>
-              <a:rPr sz="1500">
-                <a:solidFill>
-                  <a:srgbClr val="22282E"/>
-                </a:solidFill>
-              </a:rPr>
-              <a:t>•  Usa flowbits para correlacionar dos eventos de una misma sesión.</a:t>
-            </a:r>
-          </a:p>
-          <a:p>
-            <a:pPr>
-              <a:spcAft>
-                <a:spcPts val="600"/>
-              </a:spcAft>
-            </a:pPr>
-            <a:r>
-              <a:rPr sz="1500">
-                <a:solidFill>
-                  <a:srgbClr val="22282E"/>
-                </a:solidFill>
-              </a:rPr>
-              <a:t>•  Procesa un pcap con tráfico DNS y extrae con jq todas las consultas registradas por Suricata.</a:t>
-            </a:r>
-          </a:p>
-          <a:p>
-            <a:pPr>
-              <a:spcAft>
-                <a:spcPts val="600"/>
-              </a:spcAft>
-            </a:pPr>
-            <a:r>
-              <a:rPr sz="1500">
-                <a:solidFill>
-                  <a:srgbClr val="22282E"/>
-                </a:solidFill>
-              </a:rPr>
-              <a:t>•  Configura un umbral (threshold) para limitar alertas repetidas de una misma firma.</a:t>
-            </a:r>
-          </a:p>
-          <a:p>
-            <a:pPr>
-              <a:spcAft>
-                <a:spcPts val="600"/>
-              </a:spcAft>
-            </a:pPr>
-            <a:r>
-              <a:rPr sz="1500">
-                <a:solidFill>
-                  <a:srgbClr val="22282E"/>
-                </a:solidFill>
-              </a:rPr>
-              <a:t>•  Compara el rendimiento (paquetes/s) de Suricata multihilo frente a Snort en el mismo pcap.</a:t>
+              <a:t>•  Suricata 7.x: sudo apt install suricata. Actualiza reglas con suricata-update.</a:t>
+            </a:r>
+          </a:p>
+          <a:p>
+            <a:pPr>
+              <a:spcAft>
+                <a:spcPts val="600"/>
+              </a:spcAft>
+            </a:pPr>
+            <a:r>
+              <a:rPr sz="1500">
+                <a:solidFill>
+                  <a:srgbClr val="22282E"/>
+                </a:solidFill>
+              </a:rPr>
+              <a:t>•  Snort 3.x (opcional para comparar): sudo apt install snort o compilación oficial.</a:t>
+            </a:r>
+          </a:p>
+          <a:p>
+            <a:pPr>
+              <a:spcAft>
+                <a:spcPts val="600"/>
+              </a:spcAft>
+            </a:pPr>
+            <a:r>
+              <a:rPr sz="1500">
+                <a:solidFill>
+                  <a:srgbClr val="22282E"/>
+                </a:solidFill>
+              </a:rPr>
+              <a:t>•  Reglas comunitarias: Emerging Threats Open (suricata-update las trae).</a:t>
+            </a:r>
+          </a:p>
+          <a:p>
+            <a:pPr>
+              <a:spcAft>
+                <a:spcPts val="600"/>
+              </a:spcAft>
+            </a:pPr>
+            <a:r>
+              <a:rPr sz="1500">
+                <a:solidFill>
+                  <a:srgbClr val="22282E"/>
+                </a:solidFill>
+              </a:rPr>
+              <a:t>•  Herramientas de lectura: jq para el EVE JSON, tail, un pcap de prueba.</a:t>
             </a:r>
           </a:p>
         </p:txBody>
@@ -4748,7 +5109,7 @@
                   <a:srgbClr val="0B3D2E"/>
                 </a:solidFill>
               </a:rPr>
-              <a:t>📝 Reto verificable</a:t>
+              <a:t>🧪 Laboratorio guiado</a:t>
             </a:r>
           </a:p>
         </p:txBody>
@@ -4786,22 +5147,97 @@
                   <a:srgbClr val="22282E"/>
                 </a:solidFill>
               </a:rPr>
-              <a:t>•  Despliega Suricata en modo IDS en tu laboratorio, escribe una regla propia que detecte un patrón de ataque concreto (p. ej. una petición HTTP a /admin con cierto user-agent), genera el tráfico que la dispara y entrega: la regla, la línea de fast.log correspondiente y el objeto de alerta del eve.json extraído con jq.</a:t>
-            </a:r>
-          </a:p>
-          <a:p>
-            <a:pPr>
-              <a:spcAft>
-                <a:spcPts val="600"/>
-              </a:spcAft>
-            </a:pPr>
-            <a:r>
-              <a:rPr sz="1500">
-                <a:solidFill>
-                  <a:srgbClr val="22282E"/>
-                </a:solidFill>
-              </a:rPr>
-              <a:t>•  Criterio de aceptación: la regla tiene sid propio válido, la alerta aparece con el msg exacto al generar el tráfico, y no se dispara con tráfico legítimo similar (bajo falso positivo).</a:t>
+              <a:t>•  Descarga reglas y verifica configuración:</a:t>
+            </a:r>
+          </a:p>
+          <a:p>
+            <a:pPr>
+              <a:spcAft>
+                <a:spcPts val="600"/>
+              </a:spcAft>
+            </a:pPr>
+            <a:r>
+              <a:rPr sz="1500">
+                <a:solidFill>
+                  <a:srgbClr val="22282E"/>
+                </a:solidFill>
+              </a:rPr>
+              <a:t>•  Analiza un pcap con Suricata:</a:t>
+            </a:r>
+          </a:p>
+          <a:p>
+            <a:pPr>
+              <a:spcAft>
+                <a:spcPts val="600"/>
+              </a:spcAft>
+            </a:pPr>
+            <a:r>
+              <a:rPr sz="1500">
+                <a:solidFill>
+                  <a:srgbClr val="22282E"/>
+                </a:solidFill>
+              </a:rPr>
+              <a:t>•  Modo IDS en vivo sobre una interfaz:</a:t>
+            </a:r>
+          </a:p>
+          <a:p>
+            <a:pPr>
+              <a:spcAft>
+                <a:spcPts val="600"/>
+              </a:spcAft>
+            </a:pPr>
+            <a:r>
+              <a:rPr sz="1500">
+                <a:solidFill>
+                  <a:srgbClr val="22282E"/>
+                </a:solidFill>
+              </a:rPr>
+              <a:t>•  Escribe una regla propia en /etc/suricata/rules/local.rules:</a:t>
+            </a:r>
+          </a:p>
+          <a:p>
+            <a:pPr>
+              <a:spcAft>
+                <a:spcPts val="600"/>
+              </a:spcAft>
+            </a:pPr>
+            <a:r>
+              <a:rPr sz="1500">
+                <a:solidFill>
+                  <a:srgbClr val="22282E"/>
+                </a:solidFill>
+              </a:rPr>
+              <a:t>•  Añade local.rules a rule-files en el YAML y recarga.</a:t>
+            </a:r>
+          </a:p>
+          <a:p>
+            <a:pPr>
+              <a:spcAft>
+                <a:spcPts val="600"/>
+              </a:spcAft>
+            </a:pPr>
+            <a:r>
+              <a:rPr sz="1500">
+                <a:solidFill>
+                  <a:srgbClr val="22282E"/>
+                </a:solidFill>
+              </a:rPr>
+              <a:t>•  Dispara la regla: desde otra VM ping &lt;IP-de-un-host-en-HOMENET&gt; (una IP concreta de tu red de laboratorio; no uses $HOME, que la shell expande a tu directorio personal) y un curl -A "Nmap NSE"…</a:t>
+            </a:r>
+          </a:p>
+          <a:p>
+            <a:pPr>
+              <a:spcAft>
+                <a:spcPts val="600"/>
+              </a:spcAft>
+            </a:pPr>
+            <a:r>
+              <a:rPr sz="1500">
+                <a:solidFill>
+                  <a:srgbClr val="22282E"/>
+                </a:solidFill>
+              </a:rPr>
+              <a:t>•  Compara con Snort 3 (opcional):</a:t>
             </a:r>
           </a:p>
         </p:txBody>
